--- a/Leaky_Bucket.pptx
+++ b/Leaky_Bucket.pptx
@@ -17041,6 +17041,328 @@
           </a:p>
         </p:txBody>
       </p:sp>
+      <p:sp>
+        <p:nvSpPr>
+          <p:cNvPr id="9" name="Legend 9"/>
+          <p:cNvSpPr txBox="1"/>
+          <p:nvPr/>
+        </p:nvSpPr>
+        <p:spPr>
+          <a:xfrm>
+            <a:off x="304800" y="6250000"/>
+            <a:ext cx="1300000" cy="228600"/>
+          </a:xfrm>
+          <a:prstGeom prst="rect">
+            <a:avLst/>
+          </a:prstGeom>
+          <a:noFill/>
+          <a:ln>
+            <a:noFill/>
+          </a:ln>
+        </p:spPr>
+        <p:txBody>
+          <a:bodyPr wrap="none" lIns="0" tIns="0" rIns="0" bIns="0" anchor="ctr"/>
+          <a:lstStyle/>
+          <a:p>
+            <a:r>
+              <a:rPr lang="en-US" sz="1100" b="1">
+                <a:solidFill>
+                  <a:srgbClr val="404040"/>
+                </a:solidFill>
+              </a:rPr>
+              <a:t>Color key:</a:t>
+            </a:r>
+          </a:p>
+        </p:txBody>
+      </p:sp>
+      <p:sp>
+        <p:nvSpPr>
+          <p:cNvPr id="10" name="Legend 10"/>
+          <p:cNvSpPr txBox="0"/>
+          <p:nvPr/>
+        </p:nvSpPr>
+        <p:spPr>
+          <a:xfrm>
+            <a:off x="1654800" y="6250000"/>
+            <a:ext cx="228600" cy="228600"/>
+          </a:xfrm>
+          <a:prstGeom prst="rect">
+            <a:avLst/>
+          </a:prstGeom>
+          <a:solidFill>
+            <a:srgbClr val="00B050"/>
+          </a:solidFill>
+          <a:ln w="6350">
+            <a:solidFill>
+              <a:srgbClr val="7F7F7F"/>
+            </a:solidFill>
+          </a:ln>
+        </p:spPr>
+        <p:txBody>
+          <a:bodyPr wrap="none" lIns="0" tIns="0" rIns="0" bIns="0" anchor="ctr"/>
+          <a:lstStyle/>
+          <a:p>
+            <a:r>
+              <a:rPr lang="en-US" sz="1100">
+                <a:solidFill>
+                  <a:srgbClr val="404040"/>
+                </a:solidFill>
+              </a:rPr>
+              <a:t/>
+            </a:r>
+          </a:p>
+        </p:txBody>
+      </p:sp>
+      <p:sp>
+        <p:nvSpPr>
+          <p:cNvPr id="11" name="Legend 11"/>
+          <p:cNvSpPr txBox="1"/>
+          <p:nvPr/>
+        </p:nvSpPr>
+        <p:spPr>
+          <a:xfrm>
+            <a:off x="1954800" y="6250000"/>
+            <a:ext cx="650000" cy="228600"/>
+          </a:xfrm>
+          <a:prstGeom prst="rect">
+            <a:avLst/>
+          </a:prstGeom>
+          <a:noFill/>
+          <a:ln>
+            <a:noFill/>
+          </a:ln>
+        </p:spPr>
+        <p:txBody>
+          <a:bodyPr wrap="none" lIns="0" tIns="0" rIns="0" bIns="0" anchor="ctr"/>
+          <a:lstStyle/>
+          <a:p>
+            <a:r>
+              <a:rPr lang="en-US" sz="1100">
+                <a:solidFill>
+                  <a:srgbClr val="404040"/>
+                </a:solidFill>
+              </a:rPr>
+              <a:t>Strong</a:t>
+            </a:r>
+          </a:p>
+        </p:txBody>
+      </p:sp>
+      <p:sp>
+        <p:nvSpPr>
+          <p:cNvPr id="12" name="Legend 12"/>
+          <p:cNvSpPr txBox="0"/>
+          <p:nvPr/>
+        </p:nvSpPr>
+        <p:spPr>
+          <a:xfrm>
+            <a:off x="2654800" y="6250000"/>
+            <a:ext cx="228600" cy="228600"/>
+          </a:xfrm>
+          <a:prstGeom prst="rect">
+            <a:avLst/>
+          </a:prstGeom>
+          <a:solidFill>
+            <a:srgbClr val="FFFF00"/>
+          </a:solidFill>
+          <a:ln w="6350">
+            <a:solidFill>
+              <a:srgbClr val="7F7F7F"/>
+            </a:solidFill>
+          </a:ln>
+        </p:spPr>
+        <p:txBody>
+          <a:bodyPr wrap="none" lIns="0" tIns="0" rIns="0" bIns="0" anchor="ctr"/>
+          <a:lstStyle/>
+          <a:p>
+            <a:r>
+              <a:rPr lang="en-US" sz="1100">
+                <a:solidFill>
+                  <a:srgbClr val="404040"/>
+                </a:solidFill>
+              </a:rPr>
+              <a:t/>
+            </a:r>
+          </a:p>
+        </p:txBody>
+      </p:sp>
+      <p:sp>
+        <p:nvSpPr>
+          <p:cNvPr id="13" name="Legend 13"/>
+          <p:cNvSpPr txBox="1"/>
+          <p:nvPr/>
+        </p:nvSpPr>
+        <p:spPr>
+          <a:xfrm>
+            <a:off x="2954800" y="6250000"/>
+            <a:ext cx="650000" cy="228600"/>
+          </a:xfrm>
+          <a:prstGeom prst="rect">
+            <a:avLst/>
+          </a:prstGeom>
+          <a:noFill/>
+          <a:ln>
+            <a:noFill/>
+          </a:ln>
+        </p:spPr>
+        <p:txBody>
+          <a:bodyPr wrap="none" lIns="0" tIns="0" rIns="0" bIns="0" anchor="ctr"/>
+          <a:lstStyle/>
+          <a:p>
+            <a:r>
+              <a:rPr lang="en-US" sz="1100">
+                <a:solidFill>
+                  <a:srgbClr val="404040"/>
+                </a:solidFill>
+              </a:rPr>
+              <a:t>Fair</a:t>
+            </a:r>
+          </a:p>
+        </p:txBody>
+      </p:sp>
+      <p:sp>
+        <p:nvSpPr>
+          <p:cNvPr id="14" name="Legend 14"/>
+          <p:cNvSpPr txBox="0"/>
+          <p:nvPr/>
+        </p:nvSpPr>
+        <p:spPr>
+          <a:xfrm>
+            <a:off x="3654800" y="6250000"/>
+            <a:ext cx="228600" cy="228600"/>
+          </a:xfrm>
+          <a:prstGeom prst="rect">
+            <a:avLst/>
+          </a:prstGeom>
+          <a:solidFill>
+            <a:srgbClr val="FFC000"/>
+          </a:solidFill>
+          <a:ln w="6350">
+            <a:solidFill>
+              <a:srgbClr val="7F7F7F"/>
+            </a:solidFill>
+          </a:ln>
+        </p:spPr>
+        <p:txBody>
+          <a:bodyPr wrap="none" lIns="0" tIns="0" rIns="0" bIns="0" anchor="ctr"/>
+          <a:lstStyle/>
+          <a:p>
+            <a:r>
+              <a:rPr lang="en-US" sz="1100">
+                <a:solidFill>
+                  <a:srgbClr val="404040"/>
+                </a:solidFill>
+              </a:rPr>
+              <a:t/>
+            </a:r>
+          </a:p>
+        </p:txBody>
+      </p:sp>
+      <p:sp>
+        <p:nvSpPr>
+          <p:cNvPr id="15" name="Legend 15"/>
+          <p:cNvSpPr txBox="1"/>
+          <p:nvPr/>
+        </p:nvSpPr>
+        <p:spPr>
+          <a:xfrm>
+            <a:off x="3954800" y="6250000"/>
+            <a:ext cx="650000" cy="228600"/>
+          </a:xfrm>
+          <a:prstGeom prst="rect">
+            <a:avLst/>
+          </a:prstGeom>
+          <a:noFill/>
+          <a:ln>
+            <a:noFill/>
+          </a:ln>
+        </p:spPr>
+        <p:txBody>
+          <a:bodyPr wrap="none" lIns="0" tIns="0" rIns="0" bIns="0" anchor="ctr"/>
+          <a:lstStyle/>
+          <a:p>
+            <a:r>
+              <a:rPr lang="en-US" sz="1100">
+                <a:solidFill>
+                  <a:srgbClr val="404040"/>
+                </a:solidFill>
+              </a:rPr>
+              <a:t>Weak</a:t>
+            </a:r>
+          </a:p>
+        </p:txBody>
+      </p:sp>
+      <p:sp>
+        <p:nvSpPr>
+          <p:cNvPr id="16" name="Legend 16"/>
+          <p:cNvSpPr txBox="0"/>
+          <p:nvPr/>
+        </p:nvSpPr>
+        <p:spPr>
+          <a:xfrm>
+            <a:off x="4654800" y="6250000"/>
+            <a:ext cx="228600" cy="228600"/>
+          </a:xfrm>
+          <a:prstGeom prst="rect">
+            <a:avLst/>
+          </a:prstGeom>
+          <a:solidFill>
+            <a:srgbClr val="FF9999"/>
+          </a:solidFill>
+          <a:ln w="6350">
+            <a:solidFill>
+              <a:srgbClr val="7F7F7F"/>
+            </a:solidFill>
+          </a:ln>
+        </p:spPr>
+        <p:txBody>
+          <a:bodyPr wrap="none" lIns="0" tIns="0" rIns="0" bIns="0" anchor="ctr"/>
+          <a:lstStyle/>
+          <a:p>
+            <a:r>
+              <a:rPr lang="en-US" sz="1100">
+                <a:solidFill>
+                  <a:srgbClr val="404040"/>
+                </a:solidFill>
+              </a:rPr>
+              <a:t/>
+            </a:r>
+          </a:p>
+        </p:txBody>
+      </p:sp>
+      <p:sp>
+        <p:nvSpPr>
+          <p:cNvPr id="17" name="Legend 17"/>
+          <p:cNvSpPr txBox="1"/>
+          <p:nvPr/>
+        </p:nvSpPr>
+        <p:spPr>
+          <a:xfrm>
+            <a:off x="4954800" y="6250000"/>
+            <a:ext cx="650000" cy="228600"/>
+          </a:xfrm>
+          <a:prstGeom prst="rect">
+            <a:avLst/>
+          </a:prstGeom>
+          <a:noFill/>
+          <a:ln>
+            <a:noFill/>
+          </a:ln>
+        </p:spPr>
+        <p:txBody>
+          <a:bodyPr wrap="none" lIns="0" tIns="0" rIns="0" bIns="0" anchor="ctr"/>
+          <a:lstStyle/>
+          <a:p>
+            <a:r>
+              <a:rPr lang="en-US" sz="1100">
+                <a:solidFill>
+                  <a:srgbClr val="404040"/>
+                </a:solidFill>
+              </a:rPr>
+              <a:t>Poor</a:t>
+            </a:r>
+          </a:p>
+        </p:txBody>
+      </p:sp>
     </p:spTree>
     <p:extLst>
       <p:ext uri="{BB962C8B-B14F-4D97-AF65-F5344CB8AC3E}">
@@ -17095,7 +17417,7 @@
         </p:nvSpPr>
         <p:spPr>
           <a:xfrm>
-            <a:off x="838199" y="87766"/>
+            <a:off x="304800" y="87766"/>
             <a:ext cx="10515600" cy="602348"/>
           </a:xfrm>
         </p:spPr>
@@ -17107,7 +17429,7 @@
           <a:p>
             <a:r>
               <a:rPr lang="en-US" dirty="0"/>
-              <a:t>Detractors – “Leaky Bucket”</a:t>
+              <a:t>Leaky Bucket: Service and Logistics</a:t>
             </a:r>
           </a:p>
         </p:txBody>
@@ -17159,8 +17481,8 @@
           </p:nvPr>
         </p:nvGraphicFramePr>
         <p:xfrm>
-          <a:off x="-1" y="815004"/>
-          <a:ext cx="12192000" cy="5100768"/>
+          <a:off x="304800" y="815004"/>
+          <a:ext cx="11582400" cy="5100768"/>
         </p:xfrm>
         <a:graphic>
           <a:graphicData uri="http://schemas.openxmlformats.org/drawingml/2006/table">
@@ -17169,28 +17491,28 @@
                 <a:tableStyleId>{5C22544A-7EE6-4342-B048-85BDC9FD1C3A}</a:tableStyleId>
               </a:tblPr>
               <a:tblGrid>
-                <a:gridCol w="2156604">
+                <a:gridCol w="2300000">
                   <a:extLst>
                     <a:ext uri="{9D8B030D-6E8A-4147-A177-3AD203B41FA5}">
                       <a16:colId xmlns:a16="http://schemas.microsoft.com/office/drawing/2014/main" val="3044332699"/>
                     </a:ext>
                   </a:extLst>
                 </a:gridCol>
-                <a:gridCol w="1319841">
+                <a:gridCol w="900000">
                   <a:extLst>
                     <a:ext uri="{9D8B030D-6E8A-4147-A177-3AD203B41FA5}">
                       <a16:colId xmlns:a16="http://schemas.microsoft.com/office/drawing/2014/main" val="3713660959"/>
                     </a:ext>
                   </a:extLst>
                 </a:gridCol>
-                <a:gridCol w="3519578">
+                <a:gridCol w="3900000">
                   <a:extLst>
                     <a:ext uri="{9D8B030D-6E8A-4147-A177-3AD203B41FA5}">
                       <a16:colId xmlns:a16="http://schemas.microsoft.com/office/drawing/2014/main" val="388891247"/>
                     </a:ext>
                   </a:extLst>
                 </a:gridCol>
-                <a:gridCol w="5195977">
+                <a:gridCol w="4482400">
                   <a:extLst>
                     <a:ext uri="{9D8B030D-6E8A-4147-A177-3AD203B41FA5}">
                       <a16:colId xmlns:a16="http://schemas.microsoft.com/office/drawing/2014/main" val="3762181464"/>
@@ -17205,7 +17527,7 @@
                     <a:lstStyle/>
                     <a:p>
                       <a:r>
-                        <a:rPr lang="en-US" sz="1000" dirty="0"/>
+                        <a:rPr lang="en-US" sz="1100" dirty="0"/>
                         <a:t>Possible Detractor</a:t>
                       </a:r>
                     </a:p>
@@ -17255,7 +17577,7 @@
                     <a:lstStyle/>
                     <a:p>
                       <a:r>
-                        <a:rPr lang="en-US" sz="1000" dirty="0"/>
+                        <a:rPr lang="en-US" sz="1100" dirty="0"/>
                         <a:t>Henry’s Position</a:t>
                       </a:r>
                     </a:p>
@@ -17305,8 +17627,8 @@
                     <a:lstStyle/>
                     <a:p>
                       <a:r>
-                        <a:rPr lang="en-US" sz="1000" dirty="0"/>
-                        <a:t>NOTES</a:t>
+                        <a:rPr lang="en-US" sz="1100" dirty="0"/>
+                        <a:t>Notes</a:t>
                       </a:r>
                     </a:p>
                   </a:txBody>
@@ -17355,8 +17677,8 @@
                     <a:lstStyle/>
                     <a:p>
                       <a:r>
-                        <a:rPr lang="en-US" sz="1000" dirty="0"/>
-                        <a:t>FIX</a:t>
+                        <a:rPr lang="en-US" sz="1100" dirty="0"/>
+                        <a:t>Fix</a:t>
                       </a:r>
                     </a:p>
                   </a:txBody>
@@ -17412,7 +17734,7 @@
                     <a:lstStyle/>
                     <a:p>
                       <a:r>
-                        <a:rPr lang="en-US" sz="1000" b="1" dirty="0"/>
+                        <a:rPr lang="en-US" sz="1100" b="1" dirty="0"/>
                         <a:t>Service</a:t>
                       </a:r>
                     </a:p>
@@ -17464,7 +17786,7 @@
                     <a:bodyPr/>
                     <a:lstStyle/>
                     <a:p>
-                      <a:endParaRPr lang="en-US" sz="1000" dirty="0"/>
+                      <a:endParaRPr lang="en-US" sz="1100" dirty="0"/>
                     </a:p>
                   </a:txBody>
                   <a:tcPr>
@@ -17515,7 +17837,7 @@
                     <a:lstStyle/>
                     <a:p>
                       <a:r>
-                        <a:rPr lang="en-US" sz="1000" dirty="0"/>
+                        <a:rPr lang="en-US" sz="1100" dirty="0"/>
                         <a:t>Consistent feedback: we’re difficult to deal with</a:t>
                       </a:r>
                     </a:p>
@@ -17568,7 +17890,7 @@
                     <a:lstStyle/>
                     <a:p>
                       <a:r>
-                        <a:rPr lang="en-US" sz="1000" dirty="0"/>
+                        <a:rPr lang="en-US" sz="1100" dirty="0"/>
                         <a:t>Hold people accountable</a:t>
                       </a:r>
                     </a:p>
@@ -17627,12 +17949,12 @@
                     <a:bodyPr/>
                     <a:lstStyle/>
                     <a:p>
-                      <a:pPr marL="285750" indent="-285750">
+                      <a:pPr marL="171450" indent="-171450">
                         <a:buFont typeface="Arial" panose="020B0604020202020204" pitchFamily="34" charset="0"/>
                         <a:buChar char="•"/>
                       </a:pPr>
                       <a:r>
-                        <a:rPr lang="en-US" sz="1000" dirty="0"/>
+                        <a:rPr lang="en-US" sz="1100" dirty="0"/>
                         <a:t>Cumbersome order taking</a:t>
                       </a:r>
                     </a:p>
@@ -17681,7 +18003,7 @@
                     <a:bodyPr/>
                     <a:lstStyle/>
                     <a:p>
-                      <a:endParaRPr lang="en-US" sz="1000" dirty="0"/>
+                      <a:endParaRPr lang="en-US" sz="1100" dirty="0"/>
                     </a:p>
                   </a:txBody>
                   <a:tcPr>
@@ -17732,7 +18054,7 @@
                     <a:lstStyle/>
                     <a:p>
                       <a:r>
-                        <a:rPr lang="en-US" sz="1000" dirty="0"/>
+                        <a:rPr lang="en-US" sz="1100" dirty="0"/>
                         <a:t>Customer asks for “24 drums of white silicone”; CS replies with a 200-SKU Excel file asking for the SAP #</a:t>
                       </a:r>
                     </a:p>
@@ -17783,7 +18105,7 @@
                     <a:lstStyle/>
                     <a:p>
                       <a:r>
-                        <a:rPr lang="en-US" sz="1000" dirty="0"/>
+                        <a:rPr lang="en-US" sz="1100" dirty="0"/>
                         <a:t>Take orders as written; call the customer if unclear. Hold customers to the Order Acknowledgement. Rely less on sales.</a:t>
                       </a:r>
                     </a:p>
@@ -17840,12 +18162,12 @@
                     <a:bodyPr/>
                     <a:lstStyle/>
                     <a:p>
-                      <a:pPr marL="285750" indent="-285750">
+                      <a:pPr marL="171450" indent="-171450">
                         <a:buFont typeface="Arial" panose="020B0604020202020204" pitchFamily="34" charset="0"/>
                         <a:buChar char="•"/>
                       </a:pPr>
                       <a:r>
-                        <a:rPr lang="en-US" sz="1000" dirty="0"/>
+                        <a:rPr lang="en-US" sz="1100" dirty="0"/>
                         <a:t>Slow responses</a:t>
                       </a:r>
                     </a:p>
@@ -17894,7 +18216,7 @@
                     <a:bodyPr/>
                     <a:lstStyle/>
                     <a:p>
-                      <a:endParaRPr lang="en-US" sz="1000" dirty="0"/>
+                      <a:endParaRPr lang="en-US" sz="1100" dirty="0"/>
                     </a:p>
                   </a:txBody>
                   <a:tcPr>
@@ -17945,7 +18267,7 @@
                     <a:lstStyle/>
                     <a:p>
                       <a:r>
-                        <a:rPr lang="en-US" sz="1000" dirty="0"/>
+                        <a:rPr lang="en-US" sz="1100" dirty="0"/>
                         <a:t>Inquiries (not orders) can take 24+ hours</a:t>
                       </a:r>
                     </a:p>
@@ -17996,7 +18318,7 @@
                     <a:lstStyle/>
                     <a:p>
                       <a:r>
-                        <a:rPr lang="en-US" sz="1000" dirty="0"/>
+                        <a:rPr lang="en-US" sz="1100" dirty="0"/>
                         <a:t>4-hour response on all emails</a:t>
                       </a:r>
                     </a:p>
@@ -18053,12 +18375,12 @@
                     <a:bodyPr/>
                     <a:lstStyle/>
                     <a:p>
-                      <a:pPr marL="285750" indent="-285750">
+                      <a:pPr marL="171450" indent="-171450">
                         <a:buFont typeface="Arial" panose="020B0604020202020204" pitchFamily="34" charset="0"/>
                         <a:buChar char="•"/>
                       </a:pPr>
                       <a:r>
-                        <a:rPr lang="en-US" sz="1000" dirty="0"/>
+                        <a:rPr lang="en-US" sz="1100" dirty="0"/>
                         <a:t>Inflexible on requests (substitutions, alternate plants, expediting)</a:t>
                       </a:r>
                     </a:p>
@@ -18107,7 +18429,7 @@
                     <a:bodyPr/>
                     <a:lstStyle/>
                     <a:p>
-                      <a:endParaRPr lang="en-US" sz="1000" dirty="0"/>
+                      <a:endParaRPr lang="en-US" sz="1100" dirty="0"/>
                     </a:p>
                   </a:txBody>
                   <a:tcPr>
@@ -18158,7 +18480,7 @@
                     <a:lstStyle/>
                     <a:p>
                       <a:r>
-                        <a:rPr lang="en-US" sz="1000" dirty="0"/>
+                        <a:rPr lang="en-US" sz="1100" dirty="0"/>
                         <a:t>If Kingman is out of PG988 but Carson has it, CS should get it to the customer fast, especially when a date is requested</a:t>
                       </a:r>
                     </a:p>
@@ -18209,7 +18531,7 @@
                     <a:lstStyle/>
                     <a:p>
                       <a:r>
-                        <a:rPr lang="en-US" sz="1000" dirty="0"/>
+                        <a:rPr lang="en-US" sz="1100" dirty="0"/>
                         <a:t>Give CS inventory visibility across all plants. Train staff on approved substitutions.</a:t>
                       </a:r>
                     </a:p>
@@ -18271,7 +18593,7 @@
                         <a:buChar char="•"/>
                       </a:pPr>
                       <a:r>
-                        <a:rPr lang="en-US" sz="1000" b="0" dirty="0"/>
+                        <a:rPr lang="en-US" sz="1100" b="0" dirty="0"/>
                         <a:t>Slow Warranty Sign-Offs</a:t>
                       </a:r>
                     </a:p>
@@ -18324,7 +18646,7 @@
                         <a:buFont typeface="Arial" panose="020B0604020202020204" pitchFamily="34" charset="0"/>
                         <a:buChar char="•"/>
                       </a:pPr>
-                      <a:endParaRPr lang="en-US" sz="1000" b="0" dirty="0"/>
+                      <a:endParaRPr lang="en-US" sz="1100" b="0" dirty="0"/>
                     </a:p>
                   </a:txBody>
                   <a:tcPr>
@@ -18379,7 +18701,7 @@
                         <a:buNone/>
                       </a:pPr>
                       <a:r>
-                        <a:rPr lang="en-US" sz="1000" b="0" dirty="0"/>
+                        <a:rPr lang="en-US" sz="1100" b="0" dirty="0"/>
                         <a:t>Some manufacturers sign off without walking the site</a:t>
                       </a:r>
                     </a:p>
@@ -18434,7 +18756,7 @@
                         <a:buNone/>
                       </a:pPr>
                       <a:r>
-                        <a:rPr lang="en-US" sz="1000" b="0" dirty="0"/>
+                        <a:rPr lang="en-US" sz="1100" b="0" dirty="0"/>
                         <a:t>Sign off ASAP; walk the roof within the roofer’s 2-year leak window. Batch sign-offs 3+ hours from base to cut travel.</a:t>
                       </a:r>
                     </a:p>
@@ -18496,7 +18818,7 @@
                         <a:buChar char="•"/>
                       </a:pPr>
                       <a:r>
-                        <a:rPr lang="en-US" sz="1000" b="0" dirty="0"/>
+                        <a:rPr lang="en-US" sz="1100" b="0" dirty="0"/>
                         <a:t>Slow Warranty Claim Responses</a:t>
                       </a:r>
                     </a:p>
@@ -18549,7 +18871,7 @@
                         <a:buFont typeface="Arial" panose="020B0604020202020204" pitchFamily="34" charset="0"/>
                         <a:buChar char="•"/>
                       </a:pPr>
-                      <a:endParaRPr lang="en-US" sz="1000" b="0" dirty="0"/>
+                      <a:endParaRPr lang="en-US" sz="1100" b="0" dirty="0"/>
                     </a:p>
                   </a:txBody>
                   <a:tcPr>
@@ -18604,7 +18926,7 @@
                         <a:buNone/>
                       </a:pPr>
                       <a:r>
-                        <a:rPr lang="en-US" sz="1000" b="0" dirty="0"/>
+                        <a:rPr lang="en-US" sz="1100" b="0" dirty="0"/>
                         <a:t>Building owners expect action within 24 hours</a:t>
                       </a:r>
                     </a:p>
@@ -18659,7 +18981,7 @@
                         <a:buNone/>
                       </a:pPr>
                       <a:r>
-                        <a:rPr lang="en-US" sz="1000" b="0" dirty="0"/>
+                        <a:rPr lang="en-US" sz="1100" b="0" dirty="0"/>
                         <a:t>Email acknowledgement in 4 hours; site visit in 4 days</a:t>
                       </a:r>
                     </a:p>
@@ -18717,7 +19039,7 @@
                     <a:lstStyle/>
                     <a:p>
                       <a:r>
-                        <a:rPr lang="en-US" sz="1000" b="1" dirty="0"/>
+                        <a:rPr lang="en-US" sz="1100" b="1" dirty="0"/>
                         <a:t>Logistics</a:t>
                       </a:r>
                     </a:p>
@@ -18769,7 +19091,7 @@
                     <a:bodyPr/>
                     <a:lstStyle/>
                     <a:p>
-                      <a:endParaRPr lang="en-US" sz="1000" dirty="0"/>
+                      <a:endParaRPr lang="en-US" sz="1100" dirty="0"/>
                     </a:p>
                   </a:txBody>
                   <a:tcPr>
@@ -18820,7 +19142,7 @@
                     <a:lstStyle/>
                     <a:p>
                       <a:r>
-                        <a:rPr lang="en-US" sz="1000" dirty="0"/>
+                        <a:rPr lang="en-US" sz="1100" dirty="0"/>
                         <a:t>Feedback: we’re unreliable</a:t>
                       </a:r>
                     </a:p>
@@ -18873,10 +19195,10 @@
                     <a:lstStyle/>
                     <a:p>
                       <a:r>
-                        <a:rPr lang="en-US" sz="1000" dirty="0"/>
+                        <a:rPr lang="en-US" sz="1100" dirty="0"/>
                         <a:t>Push roofers to distribution (solve pricing). Trackers on pallets. CS updates customers daily, unprompted.</a:t>
                       </a:r>
-                      <a:endParaRPr lang="en-US" sz="1000" u="sng" dirty="0"/>
+                      <a:endParaRPr lang="en-US" sz="1100" u="sng" dirty="0"/>
                     </a:p>
                   </a:txBody>
                   <a:tcPr>
@@ -18933,12 +19255,12 @@
                     <a:bodyPr/>
                     <a:lstStyle/>
                     <a:p>
-                      <a:pPr marL="285750" indent="-285750">
+                      <a:pPr marL="171450" indent="-171450">
                         <a:buFont typeface="Arial" panose="020B0604020202020204" pitchFamily="34" charset="0"/>
                         <a:buChar char="•"/>
                       </a:pPr>
                       <a:r>
-                        <a:rPr lang="en-US" sz="1000" dirty="0"/>
+                        <a:rPr lang="en-US" sz="1100" dirty="0"/>
                         <a:t>No notifications/tracking</a:t>
                       </a:r>
                     </a:p>
@@ -18987,7 +19309,7 @@
                     <a:bodyPr/>
                     <a:lstStyle/>
                     <a:p>
-                      <a:endParaRPr lang="en-US" sz="1000" dirty="0"/>
+                      <a:endParaRPr lang="en-US" sz="1100" dirty="0"/>
                     </a:p>
                   </a:txBody>
                   <a:tcPr>
@@ -19038,7 +19360,7 @@
                     <a:lstStyle/>
                     <a:p>
                       <a:r>
-                        <a:rPr lang="en-US" sz="1000" dirty="0"/>
+                        <a:rPr lang="en-US" sz="1100" dirty="0"/>
                         <a:t>Material arrives days or weeks early with no one to accept it. Mainly hurts the roofer, but makes Henry/Carlisle look unprofessional too.</a:t>
                       </a:r>
                     </a:p>
@@ -19088,7 +19410,11 @@
                     <a:bodyPr/>
                     <a:lstStyle/>
                     <a:p>
-                      <a:endParaRPr lang="en-US" sz="1000" dirty="0"/>
+                      <a:r>
+                        <a:rPr lang="en-US" sz="1100"/>
+                        <a:t>Covered by the Logistics fixes above</a:t>
+                      </a:r>
+                      <a:endParaRPr lang="en-US" sz="1100" dirty="0"/>
                     </a:p>
                   </a:txBody>
                   <a:tcPr>
@@ -19143,12 +19469,12 @@
                     <a:bodyPr/>
                     <a:lstStyle/>
                     <a:p>
-                      <a:pPr marL="285750" indent="-285750">
+                      <a:pPr marL="171450" indent="-171450">
                         <a:buFont typeface="Arial" panose="020B0604020202020204" pitchFamily="34" charset="0"/>
                         <a:buChar char="•"/>
                       </a:pPr>
                       <a:r>
-                        <a:rPr lang="en-US" sz="1000" dirty="0"/>
+                        <a:rPr lang="en-US" sz="1100" dirty="0"/>
                         <a:t>Shipping at Henry’s convenience, not the customer’s</a:t>
                       </a:r>
                     </a:p>
@@ -19197,7 +19523,7 @@
                     <a:bodyPr/>
                     <a:lstStyle/>
                     <a:p>
-                      <a:endParaRPr lang="en-US" sz="1000" dirty="0"/>
+                      <a:endParaRPr lang="en-US" sz="1100" dirty="0"/>
                     </a:p>
                   </a:txBody>
                   <a:tcPr>
@@ -19248,7 +19574,7 @@
                     <a:lstStyle/>
                     <a:p>
                       <a:r>
-                        <a:rPr lang="en-US" sz="1000" dirty="0"/>
+                        <a:rPr lang="en-US" sz="1100" dirty="0"/>
                         <a:t>With no requested date, we set one on the OA, then ship early without notice. Sometimes no one is there to receive it.</a:t>
                       </a:r>
                     </a:p>
@@ -19299,7 +19625,7 @@
                     <a:lstStyle/>
                     <a:p>
                       <a:r>
-                        <a:rPr lang="en-US" sz="1000" dirty="0"/>
+                        <a:rPr lang="en-US" sz="1100" dirty="0"/>
                         <a:t>Keep the customer informed. Ask before shipping early. Provide tracking and daily updates.</a:t>
                       </a:r>
                     </a:p>
@@ -19354,6 +19680,328 @@
           </a:graphicData>
         </a:graphic>
       </p:graphicFrame>
+      <p:sp>
+        <p:nvSpPr>
+          <p:cNvPr id="11" name="Legend 11"/>
+          <p:cNvSpPr txBox="1"/>
+          <p:nvPr/>
+        </p:nvSpPr>
+        <p:spPr>
+          <a:xfrm>
+            <a:off x="304800" y="6250000"/>
+            <a:ext cx="1300000" cy="228600"/>
+          </a:xfrm>
+          <a:prstGeom prst="rect">
+            <a:avLst/>
+          </a:prstGeom>
+          <a:noFill/>
+          <a:ln>
+            <a:noFill/>
+          </a:ln>
+        </p:spPr>
+        <p:txBody>
+          <a:bodyPr wrap="none" lIns="0" tIns="0" rIns="0" bIns="0" anchor="ctr"/>
+          <a:lstStyle/>
+          <a:p>
+            <a:r>
+              <a:rPr lang="en-US" sz="1100" b="1">
+                <a:solidFill>
+                  <a:srgbClr val="404040"/>
+                </a:solidFill>
+              </a:rPr>
+              <a:t>Henry's position:</a:t>
+            </a:r>
+          </a:p>
+        </p:txBody>
+      </p:sp>
+      <p:sp>
+        <p:nvSpPr>
+          <p:cNvPr id="12" name="Legend 12"/>
+          <p:cNvSpPr txBox="0"/>
+          <p:nvPr/>
+        </p:nvSpPr>
+        <p:spPr>
+          <a:xfrm>
+            <a:off x="1654800" y="6250000"/>
+            <a:ext cx="228600" cy="228600"/>
+          </a:xfrm>
+          <a:prstGeom prst="rect">
+            <a:avLst/>
+          </a:prstGeom>
+          <a:solidFill>
+            <a:srgbClr val="00B050"/>
+          </a:solidFill>
+          <a:ln w="6350">
+            <a:solidFill>
+              <a:srgbClr val="7F7F7F"/>
+            </a:solidFill>
+          </a:ln>
+        </p:spPr>
+        <p:txBody>
+          <a:bodyPr wrap="none" lIns="0" tIns="0" rIns="0" bIns="0" anchor="ctr"/>
+          <a:lstStyle/>
+          <a:p>
+            <a:r>
+              <a:rPr lang="en-US" sz="1100">
+                <a:solidFill>
+                  <a:srgbClr val="404040"/>
+                </a:solidFill>
+              </a:rPr>
+              <a:t/>
+            </a:r>
+          </a:p>
+        </p:txBody>
+      </p:sp>
+      <p:sp>
+        <p:nvSpPr>
+          <p:cNvPr id="13" name="Legend 13"/>
+          <p:cNvSpPr txBox="1"/>
+          <p:nvPr/>
+        </p:nvSpPr>
+        <p:spPr>
+          <a:xfrm>
+            <a:off x="1954800" y="6250000"/>
+            <a:ext cx="650000" cy="228600"/>
+          </a:xfrm>
+          <a:prstGeom prst="rect">
+            <a:avLst/>
+          </a:prstGeom>
+          <a:noFill/>
+          <a:ln>
+            <a:noFill/>
+          </a:ln>
+        </p:spPr>
+        <p:txBody>
+          <a:bodyPr wrap="none" lIns="0" tIns="0" rIns="0" bIns="0" anchor="ctr"/>
+          <a:lstStyle/>
+          <a:p>
+            <a:r>
+              <a:rPr lang="en-US" sz="1100">
+                <a:solidFill>
+                  <a:srgbClr val="404040"/>
+                </a:solidFill>
+              </a:rPr>
+              <a:t>Strong</a:t>
+            </a:r>
+          </a:p>
+        </p:txBody>
+      </p:sp>
+      <p:sp>
+        <p:nvSpPr>
+          <p:cNvPr id="14" name="Legend 14"/>
+          <p:cNvSpPr txBox="0"/>
+          <p:nvPr/>
+        </p:nvSpPr>
+        <p:spPr>
+          <a:xfrm>
+            <a:off x="2654800" y="6250000"/>
+            <a:ext cx="228600" cy="228600"/>
+          </a:xfrm>
+          <a:prstGeom prst="rect">
+            <a:avLst/>
+          </a:prstGeom>
+          <a:solidFill>
+            <a:srgbClr val="FFFF00"/>
+          </a:solidFill>
+          <a:ln w="6350">
+            <a:solidFill>
+              <a:srgbClr val="7F7F7F"/>
+            </a:solidFill>
+          </a:ln>
+        </p:spPr>
+        <p:txBody>
+          <a:bodyPr wrap="none" lIns="0" tIns="0" rIns="0" bIns="0" anchor="ctr"/>
+          <a:lstStyle/>
+          <a:p>
+            <a:r>
+              <a:rPr lang="en-US" sz="1100">
+                <a:solidFill>
+                  <a:srgbClr val="404040"/>
+                </a:solidFill>
+              </a:rPr>
+              <a:t/>
+            </a:r>
+          </a:p>
+        </p:txBody>
+      </p:sp>
+      <p:sp>
+        <p:nvSpPr>
+          <p:cNvPr id="15" name="Legend 15"/>
+          <p:cNvSpPr txBox="1"/>
+          <p:nvPr/>
+        </p:nvSpPr>
+        <p:spPr>
+          <a:xfrm>
+            <a:off x="2954800" y="6250000"/>
+            <a:ext cx="650000" cy="228600"/>
+          </a:xfrm>
+          <a:prstGeom prst="rect">
+            <a:avLst/>
+          </a:prstGeom>
+          <a:noFill/>
+          <a:ln>
+            <a:noFill/>
+          </a:ln>
+        </p:spPr>
+        <p:txBody>
+          <a:bodyPr wrap="none" lIns="0" tIns="0" rIns="0" bIns="0" anchor="ctr"/>
+          <a:lstStyle/>
+          <a:p>
+            <a:r>
+              <a:rPr lang="en-US" sz="1100">
+                <a:solidFill>
+                  <a:srgbClr val="404040"/>
+                </a:solidFill>
+              </a:rPr>
+              <a:t>Fair</a:t>
+            </a:r>
+          </a:p>
+        </p:txBody>
+      </p:sp>
+      <p:sp>
+        <p:nvSpPr>
+          <p:cNvPr id="16" name="Legend 16"/>
+          <p:cNvSpPr txBox="0"/>
+          <p:nvPr/>
+        </p:nvSpPr>
+        <p:spPr>
+          <a:xfrm>
+            <a:off x="3654800" y="6250000"/>
+            <a:ext cx="228600" cy="228600"/>
+          </a:xfrm>
+          <a:prstGeom prst="rect">
+            <a:avLst/>
+          </a:prstGeom>
+          <a:solidFill>
+            <a:srgbClr val="FFC000"/>
+          </a:solidFill>
+          <a:ln w="6350">
+            <a:solidFill>
+              <a:srgbClr val="7F7F7F"/>
+            </a:solidFill>
+          </a:ln>
+        </p:spPr>
+        <p:txBody>
+          <a:bodyPr wrap="none" lIns="0" tIns="0" rIns="0" bIns="0" anchor="ctr"/>
+          <a:lstStyle/>
+          <a:p>
+            <a:r>
+              <a:rPr lang="en-US" sz="1100">
+                <a:solidFill>
+                  <a:srgbClr val="404040"/>
+                </a:solidFill>
+              </a:rPr>
+              <a:t/>
+            </a:r>
+          </a:p>
+        </p:txBody>
+      </p:sp>
+      <p:sp>
+        <p:nvSpPr>
+          <p:cNvPr id="17" name="Legend 17"/>
+          <p:cNvSpPr txBox="1"/>
+          <p:nvPr/>
+        </p:nvSpPr>
+        <p:spPr>
+          <a:xfrm>
+            <a:off x="3954800" y="6250000"/>
+            <a:ext cx="650000" cy="228600"/>
+          </a:xfrm>
+          <a:prstGeom prst="rect">
+            <a:avLst/>
+          </a:prstGeom>
+          <a:noFill/>
+          <a:ln>
+            <a:noFill/>
+          </a:ln>
+        </p:spPr>
+        <p:txBody>
+          <a:bodyPr wrap="none" lIns="0" tIns="0" rIns="0" bIns="0" anchor="ctr"/>
+          <a:lstStyle/>
+          <a:p>
+            <a:r>
+              <a:rPr lang="en-US" sz="1100">
+                <a:solidFill>
+                  <a:srgbClr val="404040"/>
+                </a:solidFill>
+              </a:rPr>
+              <a:t>Weak</a:t>
+            </a:r>
+          </a:p>
+        </p:txBody>
+      </p:sp>
+      <p:sp>
+        <p:nvSpPr>
+          <p:cNvPr id="18" name="Legend 18"/>
+          <p:cNvSpPr txBox="0"/>
+          <p:nvPr/>
+        </p:nvSpPr>
+        <p:spPr>
+          <a:xfrm>
+            <a:off x="4654800" y="6250000"/>
+            <a:ext cx="228600" cy="228600"/>
+          </a:xfrm>
+          <a:prstGeom prst="rect">
+            <a:avLst/>
+          </a:prstGeom>
+          <a:solidFill>
+            <a:srgbClr val="FF9999"/>
+          </a:solidFill>
+          <a:ln w="6350">
+            <a:solidFill>
+              <a:srgbClr val="7F7F7F"/>
+            </a:solidFill>
+          </a:ln>
+        </p:spPr>
+        <p:txBody>
+          <a:bodyPr wrap="none" lIns="0" tIns="0" rIns="0" bIns="0" anchor="ctr"/>
+          <a:lstStyle/>
+          <a:p>
+            <a:r>
+              <a:rPr lang="en-US" sz="1100">
+                <a:solidFill>
+                  <a:srgbClr val="404040"/>
+                </a:solidFill>
+              </a:rPr>
+              <a:t/>
+            </a:r>
+          </a:p>
+        </p:txBody>
+      </p:sp>
+      <p:sp>
+        <p:nvSpPr>
+          <p:cNvPr id="19" name="Legend 19"/>
+          <p:cNvSpPr txBox="1"/>
+          <p:nvPr/>
+        </p:nvSpPr>
+        <p:spPr>
+          <a:xfrm>
+            <a:off x="4954800" y="6250000"/>
+            <a:ext cx="650000" cy="228600"/>
+          </a:xfrm>
+          <a:prstGeom prst="rect">
+            <a:avLst/>
+          </a:prstGeom>
+          <a:noFill/>
+          <a:ln>
+            <a:noFill/>
+          </a:ln>
+        </p:spPr>
+        <p:txBody>
+          <a:bodyPr wrap="none" lIns="0" tIns="0" rIns="0" bIns="0" anchor="ctr"/>
+          <a:lstStyle/>
+          <a:p>
+            <a:r>
+              <a:rPr lang="en-US" sz="1100">
+                <a:solidFill>
+                  <a:srgbClr val="404040"/>
+                </a:solidFill>
+              </a:rPr>
+              <a:t>Poor</a:t>
+            </a:r>
+          </a:p>
+        </p:txBody>
+      </p:sp>
     </p:spTree>
     <p:extLst>
       <p:ext uri="{BB962C8B-B14F-4D97-AF65-F5344CB8AC3E}">
@@ -19408,7 +20056,7 @@
         </p:nvSpPr>
         <p:spPr>
           <a:xfrm>
-            <a:off x="838199" y="87766"/>
+            <a:off x="304800" y="87766"/>
             <a:ext cx="10515600" cy="602348"/>
           </a:xfrm>
         </p:spPr>
@@ -19420,7 +20068,7 @@
           <a:p>
             <a:r>
               <a:rPr lang="en-US" dirty="0"/>
-              <a:t>Detractors – “Leaky Bucket”</a:t>
+              <a:t>Leaky Bucket: Material, Systems and National Accounts</a:t>
             </a:r>
           </a:p>
         </p:txBody>
@@ -19472,8 +20120,8 @@
           </p:nvPr>
         </p:nvGraphicFramePr>
         <p:xfrm>
-          <a:off x="0" y="1199072"/>
-          <a:ext cx="12192000" cy="4105536"/>
+          <a:off x="304800" y="815004"/>
+          <a:ext cx="11582400" cy="4105536"/>
         </p:xfrm>
         <a:graphic>
           <a:graphicData uri="http://schemas.openxmlformats.org/drawingml/2006/table">
@@ -19482,28 +20130,28 @@
                 <a:tableStyleId>{5C22544A-7EE6-4342-B048-85BDC9FD1C3A}</a:tableStyleId>
               </a:tblPr>
               <a:tblGrid>
-                <a:gridCol w="2156604">
+                <a:gridCol w="2300000">
                   <a:extLst>
                     <a:ext uri="{9D8B030D-6E8A-4147-A177-3AD203B41FA5}">
                       <a16:colId xmlns:a16="http://schemas.microsoft.com/office/drawing/2014/main" val="3044332699"/>
                     </a:ext>
                   </a:extLst>
                 </a:gridCol>
-                <a:gridCol w="1319841">
+                <a:gridCol w="900000">
                   <a:extLst>
                     <a:ext uri="{9D8B030D-6E8A-4147-A177-3AD203B41FA5}">
                       <a16:colId xmlns:a16="http://schemas.microsoft.com/office/drawing/2014/main" val="3713660959"/>
                     </a:ext>
                   </a:extLst>
                 </a:gridCol>
-                <a:gridCol w="3519578">
+                <a:gridCol w="3900000">
                   <a:extLst>
                     <a:ext uri="{9D8B030D-6E8A-4147-A177-3AD203B41FA5}">
                       <a16:colId xmlns:a16="http://schemas.microsoft.com/office/drawing/2014/main" val="388891247"/>
                     </a:ext>
                   </a:extLst>
                 </a:gridCol>
-                <a:gridCol w="5195977">
+                <a:gridCol w="4482400">
                   <a:extLst>
                     <a:ext uri="{9D8B030D-6E8A-4147-A177-3AD203B41FA5}">
                       <a16:colId xmlns:a16="http://schemas.microsoft.com/office/drawing/2014/main" val="3762181464"/>
@@ -19518,7 +20166,7 @@
                     <a:lstStyle/>
                     <a:p>
                       <a:r>
-                        <a:rPr lang="en-US" sz="1000" dirty="0"/>
+                        <a:rPr lang="en-US" sz="1100" dirty="0"/>
                         <a:t>Possible Detractor</a:t>
                       </a:r>
                     </a:p>
@@ -19568,7 +20216,7 @@
                     <a:lstStyle/>
                     <a:p>
                       <a:r>
-                        <a:rPr lang="en-US" sz="1000" dirty="0"/>
+                        <a:rPr lang="en-US" sz="1100" dirty="0"/>
                         <a:t>Henry’s Position</a:t>
                       </a:r>
                     </a:p>
@@ -19618,8 +20266,8 @@
                     <a:lstStyle/>
                     <a:p>
                       <a:r>
-                        <a:rPr lang="en-US" sz="1000" dirty="0"/>
-                        <a:t>NOTES</a:t>
+                        <a:rPr lang="en-US" sz="1100" dirty="0"/>
+                        <a:t>Notes</a:t>
                       </a:r>
                     </a:p>
                   </a:txBody>
@@ -19668,8 +20316,8 @@
                     <a:lstStyle/>
                     <a:p>
                       <a:r>
-                        <a:rPr lang="en-US" sz="1000" dirty="0"/>
-                        <a:t>FIX</a:t>
+                        <a:rPr lang="en-US" sz="1100" dirty="0"/>
+                        <a:t>Fix</a:t>
                       </a:r>
                     </a:p>
                   </a:txBody>
@@ -19729,7 +20377,7 @@
                         <a:buNone/>
                       </a:pPr>
                       <a:r>
-                        <a:rPr lang="en-US" sz="1000" b="1" dirty="0"/>
+                        <a:rPr lang="en-US" sz="1100" b="1" dirty="0"/>
                         <a:t>Material and Systems</a:t>
                       </a:r>
                     </a:p>
@@ -19781,7 +20429,7 @@
                     <a:bodyPr/>
                     <a:lstStyle/>
                     <a:p>
-                      <a:endParaRPr lang="en-US" sz="1000" dirty="0"/>
+                      <a:endParaRPr lang="en-US" sz="1100" dirty="0"/>
                     </a:p>
                   </a:txBody>
                   <a:tcPr>
@@ -19831,7 +20479,7 @@
                     <a:bodyPr/>
                     <a:lstStyle/>
                     <a:p>
-                      <a:endParaRPr lang="en-US" sz="1000" dirty="0"/>
+                      <a:endParaRPr lang="en-US" sz="1100" dirty="0"/>
                     </a:p>
                   </a:txBody>
                   <a:tcPr>
@@ -19881,7 +20529,7 @@
                     <a:bodyPr/>
                     <a:lstStyle/>
                     <a:p>
-                      <a:endParaRPr lang="en-US" sz="1000" dirty="0"/>
+                      <a:endParaRPr lang="en-US" sz="1100" dirty="0"/>
                     </a:p>
                   </a:txBody>
                   <a:tcPr>
@@ -19943,7 +20591,7 @@
                         <a:buChar char="•"/>
                       </a:pPr>
                       <a:r>
-                        <a:rPr lang="en-US" sz="1000" b="0" dirty="0"/>
+                        <a:rPr lang="en-US" sz="1100" b="0" dirty="0"/>
                         <a:t>Material not ready to ship within 48 hours</a:t>
                       </a:r>
                     </a:p>
@@ -19992,7 +20640,7 @@
                     <a:bodyPr/>
                     <a:lstStyle/>
                     <a:p>
-                      <a:endParaRPr lang="en-US" sz="1000" dirty="0"/>
+                      <a:endParaRPr lang="en-US" sz="1100" dirty="0"/>
                     </a:p>
                   </a:txBody>
                   <a:tcPr>
@@ -20043,7 +20691,7 @@
                     <a:lstStyle/>
                     <a:p>
                       <a:r>
-                        <a:rPr lang="en-US" sz="1000" dirty="0"/>
+                        <a:rPr lang="en-US" sz="1100" dirty="0"/>
                         <a:t>Long-standing. Job-start items (primer, bleed blockers, mastics) must be in stock; trucks of 988 don’t help without primer.</a:t>
                       </a:r>
                     </a:p>
@@ -20094,7 +20742,7 @@
                     <a:lstStyle/>
                     <a:p>
                       <a:r>
-                        <a:rPr lang="en-US" sz="1000" dirty="0"/>
+                        <a:rPr lang="en-US" sz="1100" dirty="0"/>
                         <a:t>Raise accessory minimums. Ramp production ahead of known storms and weather.</a:t>
                       </a:r>
                     </a:p>
@@ -20156,7 +20804,7 @@
                         <a:buChar char="•"/>
                       </a:pPr>
                       <a:r>
-                        <a:rPr lang="en-US" sz="1000" b="0" dirty="0"/>
+                        <a:rPr lang="en-US" sz="1100" b="0" dirty="0"/>
                         <a:t>Inflexible on scope/specs</a:t>
                       </a:r>
                     </a:p>
@@ -20205,7 +20853,7 @@
                     <a:bodyPr/>
                     <a:lstStyle/>
                     <a:p>
-                      <a:endParaRPr lang="en-US" sz="1000" dirty="0"/>
+                      <a:endParaRPr lang="en-US" sz="1100" dirty="0"/>
                     </a:p>
                   </a:txBody>
                   <a:tcPr>
@@ -20256,7 +20904,7 @@
                     <a:lstStyle/>
                     <a:p>
                       <a:r>
-                        <a:rPr lang="en-US" sz="1000" dirty="0"/>
+                        <a:rPr lang="en-US" sz="1100" dirty="0"/>
                         <a:t>Many manufacturers require “less.” We will flex.</a:t>
                       </a:r>
                     </a:p>
@@ -20306,7 +20954,11 @@
                     <a:bodyPr/>
                     <a:lstStyle/>
                     <a:p>
-                      <a:endParaRPr lang="en-US" sz="1000" dirty="0"/>
+                      <a:r>
+                        <a:rPr lang="en-US" sz="1100"/>
+                        <a:t>None needed; protect this strength</a:t>
+                      </a:r>
+                      <a:endParaRPr lang="en-US" sz="1100" dirty="0"/>
                     </a:p>
                   </a:txBody>
                   <a:tcPr>
@@ -20366,7 +21018,7 @@
                         <a:buChar char="•"/>
                       </a:pPr>
                       <a:r>
-                        <a:rPr lang="en-US" sz="1000" b="0" dirty="0"/>
+                        <a:rPr lang="en-US" sz="1100" b="0" dirty="0"/>
                         <a:t>Failures</a:t>
                       </a:r>
                     </a:p>
@@ -20415,7 +21067,7 @@
                     <a:bodyPr/>
                     <a:lstStyle/>
                     <a:p>
-                      <a:endParaRPr lang="en-US" sz="1000" dirty="0"/>
+                      <a:endParaRPr lang="en-US" sz="1100" dirty="0"/>
                     </a:p>
                   </a:txBody>
                   <a:tcPr>
@@ -20466,7 +21118,7 @@
                     <a:lstStyle/>
                     <a:p>
                       <a:r>
-                        <a:rPr lang="en-US" sz="1000" dirty="0"/>
+                        <a:rPr lang="en-US" sz="1100" dirty="0"/>
                         <a:t>Failures kill future work with building owners</a:t>
                       </a:r>
                     </a:p>
@@ -20517,7 +21169,7 @@
                     <a:lstStyle/>
                     <a:p>
                       <a:r>
-                        <a:rPr lang="en-US" sz="1000" dirty="0"/>
+                        <a:rPr lang="en-US" sz="1100" dirty="0"/>
                         <a:t>Keep innovating</a:t>
                       </a:r>
                     </a:p>
@@ -20579,7 +21231,7 @@
                         <a:buChar char="•"/>
                       </a:pPr>
                       <a:r>
-                        <a:rPr lang="en-US" sz="1000" b="0" dirty="0"/>
+                        <a:rPr lang="en-US" sz="1100" b="0" dirty="0"/>
                         <a:t>Missing system components</a:t>
                       </a:r>
                     </a:p>
@@ -20628,7 +21280,7 @@
                     <a:bodyPr/>
                     <a:lstStyle/>
                     <a:p>
-                      <a:endParaRPr lang="en-US" sz="1000" dirty="0"/>
+                      <a:endParaRPr lang="en-US" sz="1100" dirty="0"/>
                     </a:p>
                   </a:txBody>
                   <a:tcPr>
@@ -20679,7 +21331,7 @@
                     <a:lstStyle/>
                     <a:p>
                       <a:r>
-                        <a:rPr lang="en-US" sz="1000" dirty="0"/>
+                        <a:rPr lang="en-US" sz="1100" dirty="0"/>
                         <a:t>No sprayable seam sealer for silicone systems; no cementitious coating for Arizona</a:t>
                       </a:r>
                     </a:p>
@@ -20729,7 +21381,11 @@
                     <a:bodyPr/>
                     <a:lstStyle/>
                     <a:p>
-                      <a:endParaRPr lang="en-US" sz="1000" dirty="0"/>
+                      <a:r>
+                        <a:rPr lang="en-US" sz="1100"/>
+                        <a:t>Assign an owner to close the gaps</a:t>
+                      </a:r>
+                      <a:endParaRPr lang="en-US" sz="1100" dirty="0"/>
                     </a:p>
                   </a:txBody>
                   <a:tcPr>
@@ -20789,7 +21445,7 @@
                         <a:buNone/>
                       </a:pPr>
                       <a:r>
-                        <a:rPr lang="en-US" sz="1000" b="1" dirty="0"/>
+                        <a:rPr lang="en-US" sz="1100" b="1" dirty="0"/>
                         <a:t>National Accounts</a:t>
                       </a:r>
                     </a:p>
@@ -20841,7 +21497,7 @@
                     <a:bodyPr/>
                     <a:lstStyle/>
                     <a:p>
-                      <a:endParaRPr lang="en-US" sz="1000" dirty="0"/>
+                      <a:endParaRPr lang="en-US" sz="1100" dirty="0"/>
                     </a:p>
                   </a:txBody>
                   <a:tcPr>
@@ -20891,7 +21547,7 @@
                     <a:bodyPr/>
                     <a:lstStyle/>
                     <a:p>
-                      <a:endParaRPr lang="en-US" sz="1000" dirty="0"/>
+                      <a:endParaRPr lang="en-US" sz="1100" dirty="0"/>
                     </a:p>
                   </a:txBody>
                   <a:tcPr>
@@ -20941,7 +21597,7 @@
                     <a:bodyPr/>
                     <a:lstStyle/>
                     <a:p>
-                      <a:endParaRPr lang="en-US" sz="1000" dirty="0"/>
+                      <a:endParaRPr lang="en-US" sz="1100" dirty="0"/>
                     </a:p>
                   </a:txBody>
                   <a:tcPr>
@@ -21003,7 +21659,7 @@
                         <a:buChar char="•"/>
                       </a:pPr>
                       <a:r>
-                        <a:rPr lang="en-US" sz="1000" b="0" dirty="0"/>
+                        <a:rPr lang="en-US" sz="1100" b="0" dirty="0"/>
                         <a:t>Leads that don’t close</a:t>
                       </a:r>
                     </a:p>
@@ -21052,7 +21708,7 @@
                     <a:bodyPr/>
                     <a:lstStyle/>
                     <a:p>
-                      <a:endParaRPr lang="en-US" sz="1000" dirty="0"/>
+                      <a:endParaRPr lang="en-US" sz="1100" dirty="0"/>
                     </a:p>
                   </a:txBody>
                   <a:tcPr>
@@ -21103,7 +21759,7 @@
                     <a:lstStyle/>
                     <a:p>
                       <a:r>
-                        <a:rPr lang="en-US" sz="1000" dirty="0"/>
+                        <a:rPr lang="en-US" sz="1100" dirty="0"/>
                         <a:t>National account leads close well; Facebook/website leads often don’t</a:t>
                       </a:r>
                     </a:p>
@@ -21154,7 +21810,7 @@
                     <a:lstStyle/>
                     <a:p>
                       <a:r>
-                        <a:rPr lang="en-US" sz="1000" dirty="0"/>
+                        <a:rPr lang="en-US" sz="1100" dirty="0"/>
                         <a:t>None needed</a:t>
                       </a:r>
                     </a:p>
@@ -21216,7 +21872,7 @@
                         <a:buChar char="•"/>
                       </a:pPr>
                       <a:r>
-                        <a:rPr lang="en-US" sz="1000" b="0" dirty="0"/>
+                        <a:rPr lang="en-US" sz="1100" b="0" dirty="0"/>
                         <a:t>Not enough leads</a:t>
                       </a:r>
                     </a:p>
@@ -21265,7 +21921,7 @@
                     <a:bodyPr/>
                     <a:lstStyle/>
                     <a:p>
-                      <a:endParaRPr lang="en-US" sz="1000" dirty="0"/>
+                      <a:endParaRPr lang="en-US" sz="1100" dirty="0"/>
                     </a:p>
                   </a:txBody>
                   <a:tcPr>
@@ -21316,7 +21972,7 @@
                     <a:lstStyle/>
                     <a:p>
                       <a:r>
-                        <a:rPr lang="en-US" sz="1000" dirty="0"/>
+                        <a:rPr lang="en-US" sz="1100" dirty="0"/>
                         <a:t>We’re a strong lead provider, but Sherwin-Williams supplies more through paint contracts</a:t>
                       </a:r>
                     </a:p>
@@ -21367,7 +22023,7 @@
                     <a:lstStyle/>
                     <a:p>
                       <a:r>
-                        <a:rPr lang="en-US" sz="1000" dirty="0"/>
+                        <a:rPr lang="en-US" sz="1100" dirty="0"/>
                         <a:t>Collaborate with other divisions. Free the national accounts team from firefighting and CS work to generate leads.</a:t>
                       </a:r>
                     </a:p>
@@ -21429,7 +22085,7 @@
                         <a:buChar char="•"/>
                       </a:pPr>
                       <a:r>
-                        <a:rPr lang="en-US" sz="1000" b="0" dirty="0"/>
+                        <a:rPr lang="en-US" sz="1100" b="0" dirty="0"/>
                         <a:t>Moisture Survey System</a:t>
                       </a:r>
                     </a:p>
@@ -21478,7 +22134,7 @@
                     <a:bodyPr/>
                     <a:lstStyle/>
                     <a:p>
-                      <a:endParaRPr lang="en-US" sz="1000" dirty="0"/>
+                      <a:endParaRPr lang="en-US" sz="1100" dirty="0"/>
                     </a:p>
                   </a:txBody>
                   <a:tcPr>
@@ -21529,7 +22185,7 @@
                     <a:lstStyle/>
                     <a:p>
                       <a:r>
-                        <a:rPr lang="en-US" sz="1000" dirty="0"/>
+                        <a:rPr lang="en-US" sz="1100" dirty="0"/>
                         <a:t>Some manufacturers offer contractors discounted thermal surveys through national agreements</a:t>
                       </a:r>
                     </a:p>
@@ -21580,7 +22236,7 @@
                     <a:lstStyle/>
                     <a:p>
                       <a:r>
-                        <a:rPr lang="en-US" sz="1000" dirty="0"/>
+                        <a:rPr lang="en-US" sz="1100" dirty="0"/>
                         <a:t>John T Hull</a:t>
                       </a:r>
                     </a:p>
@@ -21635,6 +22291,328 @@
           </a:graphicData>
         </a:graphic>
       </p:graphicFrame>
+      <p:sp>
+        <p:nvSpPr>
+          <p:cNvPr id="11" name="Legend 11"/>
+          <p:cNvSpPr txBox="1"/>
+          <p:nvPr/>
+        </p:nvSpPr>
+        <p:spPr>
+          <a:xfrm>
+            <a:off x="304800" y="6250000"/>
+            <a:ext cx="1300000" cy="228600"/>
+          </a:xfrm>
+          <a:prstGeom prst="rect">
+            <a:avLst/>
+          </a:prstGeom>
+          <a:noFill/>
+          <a:ln>
+            <a:noFill/>
+          </a:ln>
+        </p:spPr>
+        <p:txBody>
+          <a:bodyPr wrap="none" lIns="0" tIns="0" rIns="0" bIns="0" anchor="ctr"/>
+          <a:lstStyle/>
+          <a:p>
+            <a:r>
+              <a:rPr lang="en-US" sz="1100" b="1">
+                <a:solidFill>
+                  <a:srgbClr val="404040"/>
+                </a:solidFill>
+              </a:rPr>
+              <a:t>Henry's position:</a:t>
+            </a:r>
+          </a:p>
+        </p:txBody>
+      </p:sp>
+      <p:sp>
+        <p:nvSpPr>
+          <p:cNvPr id="12" name="Legend 12"/>
+          <p:cNvSpPr txBox="0"/>
+          <p:nvPr/>
+        </p:nvSpPr>
+        <p:spPr>
+          <a:xfrm>
+            <a:off x="1654800" y="6250000"/>
+            <a:ext cx="228600" cy="228600"/>
+          </a:xfrm>
+          <a:prstGeom prst="rect">
+            <a:avLst/>
+          </a:prstGeom>
+          <a:solidFill>
+            <a:srgbClr val="00B050"/>
+          </a:solidFill>
+          <a:ln w="6350">
+            <a:solidFill>
+              <a:srgbClr val="7F7F7F"/>
+            </a:solidFill>
+          </a:ln>
+        </p:spPr>
+        <p:txBody>
+          <a:bodyPr wrap="none" lIns="0" tIns="0" rIns="0" bIns="0" anchor="ctr"/>
+          <a:lstStyle/>
+          <a:p>
+            <a:r>
+              <a:rPr lang="en-US" sz="1100">
+                <a:solidFill>
+                  <a:srgbClr val="404040"/>
+                </a:solidFill>
+              </a:rPr>
+              <a:t/>
+            </a:r>
+          </a:p>
+        </p:txBody>
+      </p:sp>
+      <p:sp>
+        <p:nvSpPr>
+          <p:cNvPr id="13" name="Legend 13"/>
+          <p:cNvSpPr txBox="1"/>
+          <p:nvPr/>
+        </p:nvSpPr>
+        <p:spPr>
+          <a:xfrm>
+            <a:off x="1954800" y="6250000"/>
+            <a:ext cx="650000" cy="228600"/>
+          </a:xfrm>
+          <a:prstGeom prst="rect">
+            <a:avLst/>
+          </a:prstGeom>
+          <a:noFill/>
+          <a:ln>
+            <a:noFill/>
+          </a:ln>
+        </p:spPr>
+        <p:txBody>
+          <a:bodyPr wrap="none" lIns="0" tIns="0" rIns="0" bIns="0" anchor="ctr"/>
+          <a:lstStyle/>
+          <a:p>
+            <a:r>
+              <a:rPr lang="en-US" sz="1100">
+                <a:solidFill>
+                  <a:srgbClr val="404040"/>
+                </a:solidFill>
+              </a:rPr>
+              <a:t>Strong</a:t>
+            </a:r>
+          </a:p>
+        </p:txBody>
+      </p:sp>
+      <p:sp>
+        <p:nvSpPr>
+          <p:cNvPr id="14" name="Legend 14"/>
+          <p:cNvSpPr txBox="0"/>
+          <p:nvPr/>
+        </p:nvSpPr>
+        <p:spPr>
+          <a:xfrm>
+            <a:off x="2654800" y="6250000"/>
+            <a:ext cx="228600" cy="228600"/>
+          </a:xfrm>
+          <a:prstGeom prst="rect">
+            <a:avLst/>
+          </a:prstGeom>
+          <a:solidFill>
+            <a:srgbClr val="FFFF00"/>
+          </a:solidFill>
+          <a:ln w="6350">
+            <a:solidFill>
+              <a:srgbClr val="7F7F7F"/>
+            </a:solidFill>
+          </a:ln>
+        </p:spPr>
+        <p:txBody>
+          <a:bodyPr wrap="none" lIns="0" tIns="0" rIns="0" bIns="0" anchor="ctr"/>
+          <a:lstStyle/>
+          <a:p>
+            <a:r>
+              <a:rPr lang="en-US" sz="1100">
+                <a:solidFill>
+                  <a:srgbClr val="404040"/>
+                </a:solidFill>
+              </a:rPr>
+              <a:t/>
+            </a:r>
+          </a:p>
+        </p:txBody>
+      </p:sp>
+      <p:sp>
+        <p:nvSpPr>
+          <p:cNvPr id="15" name="Legend 15"/>
+          <p:cNvSpPr txBox="1"/>
+          <p:nvPr/>
+        </p:nvSpPr>
+        <p:spPr>
+          <a:xfrm>
+            <a:off x="2954800" y="6250000"/>
+            <a:ext cx="650000" cy="228600"/>
+          </a:xfrm>
+          <a:prstGeom prst="rect">
+            <a:avLst/>
+          </a:prstGeom>
+          <a:noFill/>
+          <a:ln>
+            <a:noFill/>
+          </a:ln>
+        </p:spPr>
+        <p:txBody>
+          <a:bodyPr wrap="none" lIns="0" tIns="0" rIns="0" bIns="0" anchor="ctr"/>
+          <a:lstStyle/>
+          <a:p>
+            <a:r>
+              <a:rPr lang="en-US" sz="1100">
+                <a:solidFill>
+                  <a:srgbClr val="404040"/>
+                </a:solidFill>
+              </a:rPr>
+              <a:t>Fair</a:t>
+            </a:r>
+          </a:p>
+        </p:txBody>
+      </p:sp>
+      <p:sp>
+        <p:nvSpPr>
+          <p:cNvPr id="16" name="Legend 16"/>
+          <p:cNvSpPr txBox="0"/>
+          <p:nvPr/>
+        </p:nvSpPr>
+        <p:spPr>
+          <a:xfrm>
+            <a:off x="3654800" y="6250000"/>
+            <a:ext cx="228600" cy="228600"/>
+          </a:xfrm>
+          <a:prstGeom prst="rect">
+            <a:avLst/>
+          </a:prstGeom>
+          <a:solidFill>
+            <a:srgbClr val="FFC000"/>
+          </a:solidFill>
+          <a:ln w="6350">
+            <a:solidFill>
+              <a:srgbClr val="7F7F7F"/>
+            </a:solidFill>
+          </a:ln>
+        </p:spPr>
+        <p:txBody>
+          <a:bodyPr wrap="none" lIns="0" tIns="0" rIns="0" bIns="0" anchor="ctr"/>
+          <a:lstStyle/>
+          <a:p>
+            <a:r>
+              <a:rPr lang="en-US" sz="1100">
+                <a:solidFill>
+                  <a:srgbClr val="404040"/>
+                </a:solidFill>
+              </a:rPr>
+              <a:t/>
+            </a:r>
+          </a:p>
+        </p:txBody>
+      </p:sp>
+      <p:sp>
+        <p:nvSpPr>
+          <p:cNvPr id="17" name="Legend 17"/>
+          <p:cNvSpPr txBox="1"/>
+          <p:nvPr/>
+        </p:nvSpPr>
+        <p:spPr>
+          <a:xfrm>
+            <a:off x="3954800" y="6250000"/>
+            <a:ext cx="650000" cy="228600"/>
+          </a:xfrm>
+          <a:prstGeom prst="rect">
+            <a:avLst/>
+          </a:prstGeom>
+          <a:noFill/>
+          <a:ln>
+            <a:noFill/>
+          </a:ln>
+        </p:spPr>
+        <p:txBody>
+          <a:bodyPr wrap="none" lIns="0" tIns="0" rIns="0" bIns="0" anchor="ctr"/>
+          <a:lstStyle/>
+          <a:p>
+            <a:r>
+              <a:rPr lang="en-US" sz="1100">
+                <a:solidFill>
+                  <a:srgbClr val="404040"/>
+                </a:solidFill>
+              </a:rPr>
+              <a:t>Weak</a:t>
+            </a:r>
+          </a:p>
+        </p:txBody>
+      </p:sp>
+      <p:sp>
+        <p:nvSpPr>
+          <p:cNvPr id="18" name="Legend 18"/>
+          <p:cNvSpPr txBox="0"/>
+          <p:nvPr/>
+        </p:nvSpPr>
+        <p:spPr>
+          <a:xfrm>
+            <a:off x="4654800" y="6250000"/>
+            <a:ext cx="228600" cy="228600"/>
+          </a:xfrm>
+          <a:prstGeom prst="rect">
+            <a:avLst/>
+          </a:prstGeom>
+          <a:solidFill>
+            <a:srgbClr val="FF9999"/>
+          </a:solidFill>
+          <a:ln w="6350">
+            <a:solidFill>
+              <a:srgbClr val="7F7F7F"/>
+            </a:solidFill>
+          </a:ln>
+        </p:spPr>
+        <p:txBody>
+          <a:bodyPr wrap="none" lIns="0" tIns="0" rIns="0" bIns="0" anchor="ctr"/>
+          <a:lstStyle/>
+          <a:p>
+            <a:r>
+              <a:rPr lang="en-US" sz="1100">
+                <a:solidFill>
+                  <a:srgbClr val="404040"/>
+                </a:solidFill>
+              </a:rPr>
+              <a:t/>
+            </a:r>
+          </a:p>
+        </p:txBody>
+      </p:sp>
+      <p:sp>
+        <p:nvSpPr>
+          <p:cNvPr id="19" name="Legend 19"/>
+          <p:cNvSpPr txBox="1"/>
+          <p:nvPr/>
+        </p:nvSpPr>
+        <p:spPr>
+          <a:xfrm>
+            <a:off x="4954800" y="6250000"/>
+            <a:ext cx="650000" cy="228600"/>
+          </a:xfrm>
+          <a:prstGeom prst="rect">
+            <a:avLst/>
+          </a:prstGeom>
+          <a:noFill/>
+          <a:ln>
+            <a:noFill/>
+          </a:ln>
+        </p:spPr>
+        <p:txBody>
+          <a:bodyPr wrap="none" lIns="0" tIns="0" rIns="0" bIns="0" anchor="ctr"/>
+          <a:lstStyle/>
+          <a:p>
+            <a:r>
+              <a:rPr lang="en-US" sz="1100">
+                <a:solidFill>
+                  <a:srgbClr val="404040"/>
+                </a:solidFill>
+              </a:rPr>
+              <a:t>Poor</a:t>
+            </a:r>
+          </a:p>
+        </p:txBody>
+      </p:sp>
     </p:spTree>
     <p:extLst>
       <p:ext uri="{BB962C8B-B14F-4D97-AF65-F5344CB8AC3E}">
